--- a/report_promotion.pptx
+++ b/report_promotion.pptx
@@ -5,10 +5,10 @@
     <p:sldMasterId id="2147483660" r:id="rId4"/>
   </p:sldMasterIdLst>
   <p:notesMasterIdLst>
-    <p:notesMasterId r:id="rId10"/>
+    <p:notesMasterId r:id="rId11"/>
   </p:notesMasterIdLst>
   <p:handoutMasterIdLst>
-    <p:handoutMasterId r:id="rId11"/>
+    <p:handoutMasterId r:id="rId12"/>
   </p:handoutMasterIdLst>
   <p:sldIdLst>
     <p:sldId id="256" r:id="rId5"/>
@@ -16,6 +16,7 @@
     <p:sldId id="283" r:id="rId7"/>
     <p:sldId id="279" r:id="rId8"/>
     <p:sldId id="281" r:id="rId9"/>
+    <p:sldId id="284" r:id="rId10"/>
   </p:sldIdLst>
   <p:sldSz cx="12192000" cy="6858000"/>
   <p:notesSz cx="6858000" cy="9144000"/>
@@ -128,6 +129,7 @@
             <p14:sldId id="283"/>
             <p14:sldId id="279"/>
             <p14:sldId id="281"/>
+            <p14:sldId id="284"/>
           </p14:sldIdLst>
         </p14:section>
         <p14:section name="Learn More" id="{2CC34DB2-6590-42C0-AD4B-A04C6060184E}">
@@ -160,6 +162,158 @@
 <p:cmAuthorLst xmlns:a="http://schemas.openxmlformats.org/drawingml/2006/main" xmlns:r="http://schemas.openxmlformats.org/officeDocument/2006/relationships" xmlns:p="http://schemas.openxmlformats.org/presentationml/2006/main">
   <p:cmAuthor id="2" name="Author" initials="A" lastIdx="0" clrIdx="1"/>
 </p:cmAuthorLst>
+</file>
+
+<file path=ppt/revisionInfo.xml><?xml version="1.0" encoding="utf-8"?>
+<p1510:revInfo xmlns:a="http://schemas.openxmlformats.org/drawingml/2006/main" xmlns:r="http://schemas.openxmlformats.org/officeDocument/2006/relationships" xmlns:p1510="http://schemas.microsoft.com/office/powerpoint/2015/10/main">
+  <p1510:revLst>
+    <p1510:client id="{5E12F12F-D78D-42F1-8118-8CD226D7EAEA}" v="1" dt="2026-04-06T07:13:56.391"/>
+  </p1510:revLst>
+</p1510:revInfo>
+</file>
+
+<file path=ppt/changesInfos/changesInfo1.xml><?xml version="1.0" encoding="utf-8"?>
+<pc:chgInfo xmlns:a="http://schemas.openxmlformats.org/drawingml/2006/main" xmlns:r="http://schemas.openxmlformats.org/officeDocument/2006/relationships" xmlns:ac="http://schemas.microsoft.com/office/drawing/2013/main/command" xmlns:pc="http://schemas.microsoft.com/office/powerpoint/2013/main/command">
+  <pc:docChgLst>
+    <pc:chgData name="ASUS A416J" userId="78d2537a1f535f1c" providerId="LiveId" clId="{0468F9A0-6411-4D61-AC82-378B40FDA71D}"/>
+    <pc:docChg chg="custSel addSld delSld modSld modSection">
+      <pc:chgData name="ASUS A416J" userId="78d2537a1f535f1c" providerId="LiveId" clId="{0468F9A0-6411-4D61-AC82-378B40FDA71D}" dt="2026-04-06T12:08:58.705" v="862" actId="20577"/>
+      <pc:docMkLst>
+        <pc:docMk/>
+      </pc:docMkLst>
+      <pc:sldChg chg="modSp mod">
+        <pc:chgData name="ASUS A416J" userId="78d2537a1f535f1c" providerId="LiveId" clId="{0468F9A0-6411-4D61-AC82-378B40FDA71D}" dt="2026-03-27T11:29:31.862" v="50" actId="20577"/>
+        <pc:sldMkLst>
+          <pc:docMk/>
+          <pc:sldMk cId="2471807738" sldId="256"/>
+        </pc:sldMkLst>
+        <pc:spChg chg="mod">
+          <ac:chgData name="ASUS A416J" userId="78d2537a1f535f1c" providerId="LiveId" clId="{0468F9A0-6411-4D61-AC82-378B40FDA71D}" dt="2026-03-27T11:29:13.126" v="0" actId="2711"/>
+          <ac:spMkLst>
+            <pc:docMk/>
+            <pc:sldMk cId="2471807738" sldId="256"/>
+            <ac:spMk id="2" creationId="{00000000-0000-0000-0000-000000000000}"/>
+          </ac:spMkLst>
+        </pc:spChg>
+        <pc:spChg chg="mod">
+          <ac:chgData name="ASUS A416J" userId="78d2537a1f535f1c" providerId="LiveId" clId="{0468F9A0-6411-4D61-AC82-378B40FDA71D}" dt="2026-03-27T11:29:31.862" v="50" actId="20577"/>
+          <ac:spMkLst>
+            <pc:docMk/>
+            <pc:sldMk cId="2471807738" sldId="256"/>
+            <ac:spMk id="3" creationId="{00000000-0000-0000-0000-000000000000}"/>
+          </ac:spMkLst>
+        </pc:spChg>
+      </pc:sldChg>
+      <pc:sldChg chg="modSp mod">
+        <pc:chgData name="ASUS A416J" userId="78d2537a1f535f1c" providerId="LiveId" clId="{0468F9A0-6411-4D61-AC82-378B40FDA71D}" dt="2026-03-27T11:38:12.898" v="346" actId="113"/>
+        <pc:sldMkLst>
+          <pc:docMk/>
+          <pc:sldMk cId="3457616166" sldId="271"/>
+        </pc:sldMkLst>
+        <pc:spChg chg="mod">
+          <ac:chgData name="ASUS A416J" userId="78d2537a1f535f1c" providerId="LiveId" clId="{0468F9A0-6411-4D61-AC82-378B40FDA71D}" dt="2026-03-27T11:38:12.898" v="346" actId="113"/>
+          <ac:spMkLst>
+            <pc:docMk/>
+            <pc:sldMk cId="3457616166" sldId="271"/>
+            <ac:spMk id="8" creationId="{00000000-0000-0000-0000-000000000000}"/>
+          </ac:spMkLst>
+        </pc:spChg>
+      </pc:sldChg>
+      <pc:sldChg chg="modSp mod">
+        <pc:chgData name="ASUS A416J" userId="78d2537a1f535f1c" providerId="LiveId" clId="{0468F9A0-6411-4D61-AC82-378B40FDA71D}" dt="2026-03-27T11:30:07.817" v="58" actId="20577"/>
+        <pc:sldMkLst>
+          <pc:docMk/>
+          <pc:sldMk cId="1107001750" sldId="279"/>
+        </pc:sldMkLst>
+        <pc:spChg chg="mod">
+          <ac:chgData name="ASUS A416J" userId="78d2537a1f535f1c" providerId="LiveId" clId="{0468F9A0-6411-4D61-AC82-378B40FDA71D}" dt="2026-03-27T11:30:07.817" v="58" actId="20577"/>
+          <ac:spMkLst>
+            <pc:docMk/>
+            <pc:sldMk cId="1107001750" sldId="279"/>
+            <ac:spMk id="3" creationId="{6395481D-135C-3E1C-13C9-75BD7997DBF4}"/>
+          </ac:spMkLst>
+        </pc:spChg>
+      </pc:sldChg>
+      <pc:sldChg chg="addSp delSp modSp mod delAnim">
+        <pc:chgData name="ASUS A416J" userId="78d2537a1f535f1c" providerId="LiveId" clId="{0468F9A0-6411-4D61-AC82-378B40FDA71D}" dt="2026-03-27T11:47:45.877" v="726" actId="14100"/>
+        <pc:sldMkLst>
+          <pc:docMk/>
+          <pc:sldMk cId="958036878" sldId="281"/>
+        </pc:sldMkLst>
+        <pc:spChg chg="mod">
+          <ac:chgData name="ASUS A416J" userId="78d2537a1f535f1c" providerId="LiveId" clId="{0468F9A0-6411-4D61-AC82-378B40FDA71D}" dt="2026-03-27T11:38:02.454" v="344" actId="113"/>
+          <ac:spMkLst>
+            <pc:docMk/>
+            <pc:sldMk cId="958036878" sldId="281"/>
+            <ac:spMk id="3" creationId="{00000000-0000-0000-0000-000000000000}"/>
+          </ac:spMkLst>
+        </pc:spChg>
+        <pc:spChg chg="mod">
+          <ac:chgData name="ASUS A416J" userId="78d2537a1f535f1c" providerId="LiveId" clId="{0468F9A0-6411-4D61-AC82-378B40FDA71D}" dt="2026-03-27T11:47:45.877" v="726" actId="14100"/>
+          <ac:spMkLst>
+            <pc:docMk/>
+            <pc:sldMk cId="958036878" sldId="281"/>
+            <ac:spMk id="5" creationId="{00000000-0000-0000-0000-000000000000}"/>
+          </ac:spMkLst>
+        </pc:spChg>
+        <pc:picChg chg="add mod">
+          <ac:chgData name="ASUS A416J" userId="78d2537a1f535f1c" providerId="LiveId" clId="{0468F9A0-6411-4D61-AC82-378B40FDA71D}" dt="2026-03-27T11:47:33.507" v="724" actId="14100"/>
+          <ac:picMkLst>
+            <pc:docMk/>
+            <pc:sldMk cId="958036878" sldId="281"/>
+            <ac:picMk id="8" creationId="{9987CEE3-868D-8B62-9C56-C7EE9937D2FB}"/>
+          </ac:picMkLst>
+        </pc:picChg>
+      </pc:sldChg>
+      <pc:sldChg chg="modSp mod">
+        <pc:chgData name="ASUS A416J" userId="78d2537a1f535f1c" providerId="LiveId" clId="{0468F9A0-6411-4D61-AC82-378B40FDA71D}" dt="2026-04-06T12:08:58.705" v="862" actId="20577"/>
+        <pc:sldMkLst>
+          <pc:docMk/>
+          <pc:sldMk cId="4232591875" sldId="283"/>
+        </pc:sldMkLst>
+        <pc:spChg chg="mod">
+          <ac:chgData name="ASUS A416J" userId="78d2537a1f535f1c" providerId="LiveId" clId="{0468F9A0-6411-4D61-AC82-378B40FDA71D}" dt="2026-04-06T12:08:58.705" v="862" actId="20577"/>
+          <ac:spMkLst>
+            <pc:docMk/>
+            <pc:sldMk cId="4232591875" sldId="283"/>
+            <ac:spMk id="8" creationId="{8681AF5C-41EF-A7A8-BB55-56947CA607EA}"/>
+          </ac:spMkLst>
+        </pc:spChg>
+      </pc:sldChg>
+      <pc:sldChg chg="delSp modSp add mod">
+        <pc:chgData name="ASUS A416J" userId="78d2537a1f535f1c" providerId="LiveId" clId="{0468F9A0-6411-4D61-AC82-378B40FDA71D}" dt="2026-04-06T07:15:24.200" v="853" actId="14100"/>
+        <pc:sldMkLst>
+          <pc:docMk/>
+          <pc:sldMk cId="4017595758" sldId="284"/>
+        </pc:sldMkLst>
+        <pc:spChg chg="mod">
+          <ac:chgData name="ASUS A416J" userId="78d2537a1f535f1c" providerId="LiveId" clId="{0468F9A0-6411-4D61-AC82-378B40FDA71D}" dt="2026-04-06T07:08:44.019" v="746" actId="20577"/>
+          <ac:spMkLst>
+            <pc:docMk/>
+            <pc:sldMk cId="4017595758" sldId="284"/>
+            <ac:spMk id="3" creationId="{F09D34CF-1BA4-9CAE-160A-5FF8F2BD61D7}"/>
+          </ac:spMkLst>
+        </pc:spChg>
+        <pc:spChg chg="mod">
+          <ac:chgData name="ASUS A416J" userId="78d2537a1f535f1c" providerId="LiveId" clId="{0468F9A0-6411-4D61-AC82-378B40FDA71D}" dt="2026-04-06T07:15:24.200" v="853" actId="14100"/>
+          <ac:spMkLst>
+            <pc:docMk/>
+            <pc:sldMk cId="4017595758" sldId="284"/>
+            <ac:spMk id="5" creationId="{9EAF4190-6541-5A19-ED96-093EDB2CD1B1}"/>
+          </ac:spMkLst>
+        </pc:spChg>
+        <pc:picChg chg="del">
+          <ac:chgData name="ASUS A416J" userId="78d2537a1f535f1c" providerId="LiveId" clId="{0468F9A0-6411-4D61-AC82-378B40FDA71D}" dt="2026-04-06T07:08:46.377" v="747" actId="478"/>
+          <ac:picMkLst>
+            <pc:docMk/>
+            <pc:sldMk cId="4017595758" sldId="284"/>
+            <ac:picMk id="8" creationId="{680097BD-9CE9-450D-704A-980136F9231E}"/>
+          </ac:picMkLst>
+        </pc:picChg>
+      </pc:sldChg>
+    </pc:docChg>
+  </pc:docChgLst>
+</pc:chgInfo>
 </file>
 
 <file path=ppt/charts/chart1.xml><?xml version="1.0" encoding="utf-8"?>
@@ -4387,7 +4541,7 @@
           <a:p>
             <a:fld id="{80680FBE-A8DF-4758-9AC4-3A9E1039168F}" type="datetimeFigureOut">
               <a:rPr lang="en-US" smtClean="0"/>
-              <a:t>3/27/2026</a:t>
+              <a:t>4/6/2026</a:t>
             </a:fld>
             <a:endParaRPr lang="en-US" dirty="0"/>
           </a:p>
@@ -4552,7 +4706,7 @@
           <a:p>
             <a:fld id="{EC13577B-6902-467D-A26C-08A0DD5E4E03}" type="datetimeFigureOut">
               <a:rPr lang="en-US" smtClean="0"/>
-              <a:t>3/27/2026</a:t>
+              <a:t>4/6/2026</a:t>
             </a:fld>
             <a:endParaRPr lang="en-US" dirty="0"/>
           </a:p>
@@ -5347,7 +5501,7 @@
             <a:fld id="{8BEEBAAA-29B5-4AF5-BC5F-7E580C29002D}" type="datetimeFigureOut">
               <a:rPr lang="en-US" smtClean="0"/>
               <a:pPr/>
-              <a:t>3/27/2026</a:t>
+              <a:t>4/6/2026</a:t>
             </a:fld>
             <a:endParaRPr lang="en-US" dirty="0"/>
           </a:p>
@@ -5973,7 +6127,7 @@
             <a:fld id="{8BEEBAAA-29B5-4AF5-BC5F-7E580C29002D}" type="datetimeFigureOut">
               <a:rPr lang="en-US" smtClean="0"/>
               <a:pPr/>
-              <a:t>3/27/2026</a:t>
+              <a:t>4/6/2026</a:t>
             </a:fld>
             <a:endParaRPr lang="en-US" dirty="0"/>
           </a:p>
@@ -7140,7 +7294,7 @@
                 <a:latin typeface="Segoe UI Light" panose="020B0502040204020203" pitchFamily="34" charset="0"/>
                 <a:cs typeface="Segoe UI Light" panose="020B0502040204020203" pitchFamily="34" charset="0"/>
               </a:rPr>
-              <a:t>B. Increases and Decreases in Visits (Comparing Los Angeles and  )</a:t>
+              <a:t>B. Increases and Decreases in Visits (Comparing Los Angeles and Boston  )</a:t>
             </a:r>
           </a:p>
         </p:txBody>
@@ -7870,6 +8024,232 @@
     <p:extLst>
       <p:ext uri="{BB962C8B-B14F-4D97-AF65-F5344CB8AC3E}">
         <p14:creationId xmlns:p14="http://schemas.microsoft.com/office/powerpoint/2010/main" val="958036878"/>
+      </p:ext>
+    </p:extLst>
+  </p:cSld>
+  <p:clrMapOvr>
+    <a:masterClrMapping/>
+  </p:clrMapOvr>
+  <mc:AlternateContent xmlns:mc="http://schemas.openxmlformats.org/markup-compatibility/2006" xmlns:p14="http://schemas.microsoft.com/office/powerpoint/2010/main">
+    <mc:Choice Requires="p14">
+      <p:transition p14:dur="10"/>
+    </mc:Choice>
+    <mc:Fallback xmlns="">
+      <p:transition/>
+    </mc:Fallback>
+  </mc:AlternateContent>
+</p:sld>
+</file>
+
+<file path=ppt/slides/slide6.xml><?xml version="1.0" encoding="utf-8"?>
+<p:sld xmlns:a="http://schemas.openxmlformats.org/drawingml/2006/main" xmlns:r="http://schemas.openxmlformats.org/officeDocument/2006/relationships" xmlns:p="http://schemas.openxmlformats.org/presentationml/2006/main">
+  <p:cSld>
+    <p:spTree>
+      <p:nvGrpSpPr>
+        <p:cNvPr id="1" name="">
+          <a:extLst>
+            <a:ext uri="{FF2B5EF4-FFF2-40B4-BE49-F238E27FC236}">
+              <a16:creationId xmlns:a16="http://schemas.microsoft.com/office/drawing/2014/main" id="{D29FBB9E-5E96-65F4-A814-D43D65AA0B06}"/>
+            </a:ext>
+          </a:extLst>
+        </p:cNvPr>
+        <p:cNvGrpSpPr/>
+        <p:nvPr/>
+      </p:nvGrpSpPr>
+      <p:grpSpPr>
+        <a:xfrm>
+          <a:off x="0" y="0"/>
+          <a:ext cx="0" cy="0"/>
+          <a:chOff x="0" y="0"/>
+          <a:chExt cx="0" cy="0"/>
+        </a:xfrm>
+      </p:grpSpPr>
+      <p:sp>
+        <p:nvSpPr>
+          <p:cNvPr id="3" name="Title 2">
+            <a:extLst>
+              <a:ext uri="{FF2B5EF4-FFF2-40B4-BE49-F238E27FC236}">
+                <a16:creationId xmlns:a16="http://schemas.microsoft.com/office/drawing/2014/main" id="{F09D34CF-1BA4-9CAE-160A-5FF8F2BD61D7}"/>
+              </a:ext>
+            </a:extLst>
+          </p:cNvPr>
+          <p:cNvSpPr>
+            <a:spLocks noGrp="1"/>
+          </p:cNvSpPr>
+          <p:nvPr>
+            <p:ph type="title"/>
+          </p:nvPr>
+        </p:nvSpPr>
+        <p:spPr/>
+        <p:txBody>
+          <a:bodyPr/>
+          <a:lstStyle/>
+          <a:p>
+            <a:r>
+              <a:rPr lang="en-US" b="1" dirty="0">
+                <a:latin typeface="Segoe UI Light" panose="020B0502040204020203" pitchFamily="34" charset="0"/>
+                <a:cs typeface="Segoe UI Light" panose="020B0502040204020203" pitchFamily="34" charset="0"/>
+              </a:rPr>
+              <a:t>E. CONCLUSION</a:t>
+            </a:r>
+          </a:p>
+        </p:txBody>
+      </p:sp>
+      <p:sp>
+        <p:nvSpPr>
+          <p:cNvPr id="5" name="Content Placeholder 4">
+            <a:extLst>
+              <a:ext uri="{FF2B5EF4-FFF2-40B4-BE49-F238E27FC236}">
+                <a16:creationId xmlns:a16="http://schemas.microsoft.com/office/drawing/2014/main" id="{9EAF4190-6541-5A19-ED96-093EDB2CD1B1}"/>
+              </a:ext>
+            </a:extLst>
+          </p:cNvPr>
+          <p:cNvSpPr>
+            <a:spLocks noGrp="1"/>
+          </p:cNvSpPr>
+          <p:nvPr>
+            <p:ph sz="half" idx="4294967295"/>
+          </p:nvPr>
+        </p:nvSpPr>
+        <p:spPr>
+          <a:xfrm>
+            <a:off x="1389412" y="1550752"/>
+            <a:ext cx="8756074" cy="4327534"/>
+          </a:xfrm>
+        </p:spPr>
+        <p:txBody>
+          <a:bodyPr vert="horz" lIns="91440" tIns="45720" rIns="91440" bIns="45720" rtlCol="0">
+            <a:noAutofit/>
+          </a:bodyPr>
+          <a:lstStyle/>
+          <a:p>
+            <a:pPr marL="457200" indent="-457200" algn="just">
+              <a:lnSpc>
+                <a:spcPts val="1800"/>
+              </a:lnSpc>
+              <a:spcAft>
+                <a:spcPts val="600"/>
+              </a:spcAft>
+              <a:buAutoNum type="arabicPeriod"/>
+            </a:pPr>
+            <a:r>
+              <a:rPr lang="en-US" sz="1600" dirty="0">
+                <a:solidFill>
+                  <a:prstClr val="black">
+                    <a:lumMod val="75000"/>
+                    <a:lumOff val="25000"/>
+                  </a:prstClr>
+                </a:solidFill>
+                <a:latin typeface="Arial" panose="020B0604020202020204" pitchFamily="34" charset="0"/>
+                <a:cs typeface="Arial" panose="020B0604020202020204" pitchFamily="34" charset="0"/>
+              </a:rPr>
+              <a:t>Use other promotions if the one you’re currently using seems to be stagnating or even causing sales to drop. </a:t>
+            </a:r>
+          </a:p>
+          <a:p>
+            <a:pPr marL="457200" indent="-457200" algn="just">
+              <a:lnSpc>
+                <a:spcPts val="1800"/>
+              </a:lnSpc>
+              <a:spcAft>
+                <a:spcPts val="600"/>
+              </a:spcAft>
+              <a:buAutoNum type="arabicPeriod"/>
+            </a:pPr>
+            <a:r>
+              <a:rPr lang="en-US" sz="1600" dirty="0">
+                <a:solidFill>
+                  <a:prstClr val="black">
+                    <a:lumMod val="75000"/>
+                    <a:lumOff val="25000"/>
+                  </a:prstClr>
+                </a:solidFill>
+                <a:latin typeface="Arial" panose="020B0604020202020204" pitchFamily="34" charset="0"/>
+                <a:cs typeface="Arial" panose="020B0604020202020204" pitchFamily="34" charset="0"/>
+              </a:rPr>
+              <a:t>Consider your target market, such as urban or suburban areas. Urban residents have higher purchasing power and a higher standard of living; they prefer promotions that make a big impression, such as major events or discounts, rather than “buy one, get one free” offers.</a:t>
+            </a:r>
+          </a:p>
+          <a:p>
+            <a:pPr marL="457200" indent="-457200" algn="just">
+              <a:lnSpc>
+                <a:spcPts val="1800"/>
+              </a:lnSpc>
+              <a:spcAft>
+                <a:spcPts val="600"/>
+              </a:spcAft>
+              <a:buAutoNum type="arabicPeriod"/>
+            </a:pPr>
+            <a:r>
+              <a:rPr lang="en-US" sz="1600" dirty="0">
+                <a:solidFill>
+                  <a:prstClr val="black">
+                    <a:lumMod val="75000"/>
+                    <a:lumOff val="25000"/>
+                  </a:prstClr>
+                </a:solidFill>
+                <a:latin typeface="Arial" panose="020B0604020202020204" pitchFamily="34" charset="0"/>
+                <a:cs typeface="Arial" panose="020B0604020202020204" pitchFamily="34" charset="0"/>
+              </a:rPr>
+              <a:t>Suburban residents prioritize functionality; discounts are generally more effective in suburban areas. However, this isn’t true for </a:t>
+            </a:r>
+            <a:r>
+              <a:rPr lang="en-US" sz="1600" dirty="0" err="1">
+                <a:solidFill>
+                  <a:prstClr val="black">
+                    <a:lumMod val="75000"/>
+                    <a:lumOff val="25000"/>
+                  </a:prstClr>
+                </a:solidFill>
+                <a:latin typeface="Arial" panose="020B0604020202020204" pitchFamily="34" charset="0"/>
+                <a:cs typeface="Arial" panose="020B0604020202020204" pitchFamily="34" charset="0"/>
+              </a:rPr>
+              <a:t>evaery</a:t>
+            </a:r>
+            <a:r>
+              <a:rPr lang="en-US" sz="1600" dirty="0">
+                <a:solidFill>
+                  <a:prstClr val="black">
+                    <a:lumMod val="75000"/>
+                    <a:lumOff val="25000"/>
+                  </a:prstClr>
+                </a:solidFill>
+                <a:latin typeface="Arial" panose="020B0604020202020204" pitchFamily="34" charset="0"/>
+                <a:cs typeface="Arial" panose="020B0604020202020204" pitchFamily="34" charset="0"/>
+              </a:rPr>
+              <a:t> area—it applies to almost all. Therefore, it’s still necessary to conduct a one-week promotional test. However, if the previous promotion has already increased sales or foot traffic, there’s no need to change it.</a:t>
+            </a:r>
+          </a:p>
+          <a:p>
+            <a:pPr marL="457200" indent="-457200" algn="just">
+              <a:lnSpc>
+                <a:spcPts val="1800"/>
+              </a:lnSpc>
+              <a:spcAft>
+                <a:spcPts val="600"/>
+              </a:spcAft>
+              <a:buAutoNum type="arabicPeriod"/>
+            </a:pPr>
+            <a:r>
+              <a:rPr lang="en-US" sz="1600" dirty="0">
+                <a:solidFill>
+                  <a:prstClr val="black">
+                    <a:lumMod val="75000"/>
+                    <a:lumOff val="25000"/>
+                  </a:prstClr>
+                </a:solidFill>
+                <a:latin typeface="Arial" panose="020B0604020202020204" pitchFamily="34" charset="0"/>
+                <a:cs typeface="Arial" panose="020B0604020202020204" pitchFamily="34" charset="0"/>
+              </a:rPr>
+              <a:t>Evaluate initiatives, such as switching from paper receipts to digital ones to reduce paper waste (if sales have successfully increased)Store cleanliness, store comfort, and most importantly, the store’s friendliness toward all customers without exception</a:t>
+            </a:r>
+          </a:p>
+        </p:txBody>
+      </p:sp>
+    </p:spTree>
+    <p:extLst>
+      <p:ext uri="{BB962C8B-B14F-4D97-AF65-F5344CB8AC3E}">
+        <p14:creationId xmlns:p14="http://schemas.microsoft.com/office/powerpoint/2010/main" val="4017595758"/>
       </p:ext>
     </p:extLst>
   </p:cSld>
